--- a/docs/인수인계/AI_V2X_연결구조_다이어그램_report.pptx
+++ b/docs/인수인계/AI_V2X_연결구조_다이어그램_report.pptx
@@ -5479,7 +5479,7 @@
                 <a:ea typeface="맑은 고딕" pitchFamily="34" charset="-122"/>
                 <a:cs typeface="맑은 고딕" pitchFamily="34" charset="-120"/>
               </a:rPr>
-              <a:t>예: 상도로 일대 도로 구간 클릭 → 누적 위험 통계 표시</a:t>
+              <a:t>예: 실험 지역 일대 도로 구간 클릭 → 누적 위험 통계 표시</a:t>
             </a:r>
             <a:endParaRPr lang="en-US" sz="1200" dirty="0"/>
           </a:p>

--- a/docs/인수인계/AI_V2X_연결구조_다이어그램_report.pptx
+++ b/docs/인수인계/AI_V2X_연결구조_다이어그램_report.pptx
@@ -3472,7 +3472,7 @@
                 <a:ea typeface="Consolas" pitchFamily="34" charset="-122"/>
                 <a:cs typeface="Consolas" pitchFamily="34" charset="-120"/>
               </a:rPr>
-              <a:t>  "lat": 37.4997,  "lng": 126.9516,</a:t>
+              <a:t>  "lat": 37.0000,  "lng": 127.0000,</a:t>
             </a:r>
             <a:endParaRPr lang="en-US" sz="1250" dirty="0"/>
           </a:p>
@@ -3657,7 +3657,7 @@
                 <a:ea typeface="Consolas" pitchFamily="34" charset="-122"/>
                 <a:cs typeface="Consolas" pitchFamily="34" charset="-120"/>
               </a:rPr>
-              <a:t>  "points": [[37.49,126.95],[37.50,126.95]],</a:t>
+              <a:t>  "points": [[37.00,127.00],[37.01,127.00]],</a:t>
             </a:r>
             <a:endParaRPr lang="en-US" sz="1250" dirty="0"/>
           </a:p>
